--- a/Aula_06/Arvore.pptx
+++ b/Aula_06/Arvore.pptx
@@ -14079,7 +14079,7 @@
         </p:nvSpPr>
         <p:spPr>
           <a:xfrm>
-            <a:off x="457200" y="228600"/>
+            <a:off x="457200" y="221827"/>
             <a:ext cx="8229600" cy="594360"/>
           </a:xfrm>
           <a:prstGeom prst="rect">
@@ -15423,9 +15423,6 @@
           <a:bodyPr wrap="square" lIns="0" tIns="0" rIns="0" bIns="0" rtlCol="0" anchor="t"/>
           <a:lstStyle/>
           <a:p>
-            <a:pPr marL="0" indent="0">
-              <a:buNone/>
-            </a:pPr>
             <a:r>
               <a:rPr lang="en-US" sz="1200" dirty="0">
                 <a:solidFill>
@@ -15435,7 +15432,172 @@
                 <a:ea typeface="Calibri" pitchFamily="34" charset="-122"/>
                 <a:cs typeface="Calibri" pitchFamily="34" charset="-120"/>
               </a:rPr>
-              <a:t>Entra o maior da subárvore esquerda (remover 38)</a:t>
+              <a:t>(remover 38) </a:t>
+            </a:r>
+            <a:r>
+              <a:rPr lang="en-US" sz="1200" dirty="0" err="1">
+                <a:solidFill>
+                  <a:srgbClr val="22303F"/>
+                </a:solidFill>
+                <a:latin typeface="Calibri" pitchFamily="34" charset="0"/>
+                <a:ea typeface="Calibri" pitchFamily="34" charset="-122"/>
+                <a:cs typeface="Calibri" pitchFamily="34" charset="-120"/>
+              </a:rPr>
+              <a:t>Entra</a:t>
+            </a:r>
+            <a:r>
+              <a:rPr lang="en-US" sz="1200" dirty="0">
+                <a:solidFill>
+                  <a:srgbClr val="22303F"/>
+                </a:solidFill>
+                <a:latin typeface="Calibri" pitchFamily="34" charset="0"/>
+                <a:ea typeface="Calibri" pitchFamily="34" charset="-122"/>
+                <a:cs typeface="Calibri" pitchFamily="34" charset="-120"/>
+              </a:rPr>
+              <a:t> o </a:t>
+            </a:r>
+            <a:r>
+              <a:rPr lang="en-US" sz="1200" dirty="0" err="1">
+                <a:solidFill>
+                  <a:srgbClr val="22303F"/>
+                </a:solidFill>
+                <a:latin typeface="Calibri" pitchFamily="34" charset="0"/>
+                <a:ea typeface="Calibri" pitchFamily="34" charset="-122"/>
+                <a:cs typeface="Calibri" pitchFamily="34" charset="-120"/>
+              </a:rPr>
+              <a:t>maior</a:t>
+            </a:r>
+            <a:r>
+              <a:rPr lang="en-US" sz="1200" dirty="0">
+                <a:solidFill>
+                  <a:srgbClr val="22303F"/>
+                </a:solidFill>
+                <a:latin typeface="Calibri" pitchFamily="34" charset="0"/>
+                <a:ea typeface="Calibri" pitchFamily="34" charset="-122"/>
+                <a:cs typeface="Calibri" pitchFamily="34" charset="-120"/>
+              </a:rPr>
+              <a:t> da </a:t>
+            </a:r>
+            <a:r>
+              <a:rPr lang="en-US" sz="1200" dirty="0" err="1">
+                <a:solidFill>
+                  <a:srgbClr val="22303F"/>
+                </a:solidFill>
+                <a:latin typeface="Calibri" pitchFamily="34" charset="0"/>
+                <a:ea typeface="Calibri" pitchFamily="34" charset="-122"/>
+                <a:cs typeface="Calibri" pitchFamily="34" charset="-120"/>
+              </a:rPr>
+              <a:t>subárvore</a:t>
+            </a:r>
+            <a:r>
+              <a:rPr lang="en-US" sz="1200" dirty="0">
+                <a:solidFill>
+                  <a:srgbClr val="22303F"/>
+                </a:solidFill>
+                <a:latin typeface="Calibri" pitchFamily="34" charset="0"/>
+                <a:ea typeface="Calibri" pitchFamily="34" charset="-122"/>
+                <a:cs typeface="Calibri" pitchFamily="34" charset="-120"/>
+              </a:rPr>
+              <a:t> </a:t>
+            </a:r>
+            <a:r>
+              <a:rPr lang="en-US" sz="1200" dirty="0" err="1">
+                <a:solidFill>
+                  <a:srgbClr val="22303F"/>
+                </a:solidFill>
+                <a:latin typeface="Calibri" pitchFamily="34" charset="0"/>
+                <a:ea typeface="Calibri" pitchFamily="34" charset="-122"/>
+                <a:cs typeface="Calibri" pitchFamily="34" charset="-120"/>
+              </a:rPr>
+              <a:t>esquerda</a:t>
+            </a:r>
+            <a:r>
+              <a:rPr lang="en-US" sz="1200" dirty="0">
+                <a:solidFill>
+                  <a:srgbClr val="22303F"/>
+                </a:solidFill>
+                <a:latin typeface="Calibri" pitchFamily="34" charset="0"/>
+                <a:ea typeface="Calibri" pitchFamily="34" charset="-122"/>
+                <a:cs typeface="Calibri" pitchFamily="34" charset="-120"/>
+              </a:rPr>
+              <a:t> </a:t>
+            </a:r>
+            <a:r>
+              <a:rPr lang="en-US" sz="1200" dirty="0" err="1">
+                <a:solidFill>
+                  <a:srgbClr val="22303F"/>
+                </a:solidFill>
+                <a:latin typeface="Calibri" pitchFamily="34" charset="0"/>
+                <a:ea typeface="Calibri" pitchFamily="34" charset="-122"/>
+                <a:cs typeface="Calibri" pitchFamily="34" charset="-120"/>
+              </a:rPr>
+              <a:t>ou</a:t>
+            </a:r>
+            <a:r>
+              <a:rPr lang="en-US" sz="1200" dirty="0">
+                <a:solidFill>
+                  <a:srgbClr val="22303F"/>
+                </a:solidFill>
+                <a:latin typeface="Calibri" pitchFamily="34" charset="0"/>
+                <a:ea typeface="Calibri" pitchFamily="34" charset="-122"/>
+                <a:cs typeface="Calibri" pitchFamily="34" charset="-120"/>
+              </a:rPr>
+              <a:t> </a:t>
+            </a:r>
+            <a:r>
+              <a:rPr lang="en-US" sz="1200" dirty="0" err="1">
+                <a:solidFill>
+                  <a:srgbClr val="22303F"/>
+                </a:solidFill>
+                <a:latin typeface="Calibri" pitchFamily="34" charset="0"/>
+                <a:ea typeface="Calibri" pitchFamily="34" charset="-122"/>
+                <a:cs typeface="Calibri" pitchFamily="34" charset="-120"/>
+              </a:rPr>
+              <a:t>menor</a:t>
+            </a:r>
+            <a:r>
+              <a:rPr lang="en-US" sz="1200" dirty="0">
+                <a:solidFill>
+                  <a:srgbClr val="22303F"/>
+                </a:solidFill>
+                <a:latin typeface="Calibri" pitchFamily="34" charset="0"/>
+                <a:ea typeface="Calibri" pitchFamily="34" charset="-122"/>
+                <a:cs typeface="Calibri" pitchFamily="34" charset="-120"/>
+              </a:rPr>
+              <a:t> da </a:t>
+            </a:r>
+            <a:r>
+              <a:rPr lang="en-US" sz="1200" dirty="0" err="1">
+                <a:solidFill>
+                  <a:srgbClr val="22303F"/>
+                </a:solidFill>
+                <a:latin typeface="Calibri" pitchFamily="34" charset="0"/>
+                <a:ea typeface="Calibri" pitchFamily="34" charset="-122"/>
+                <a:cs typeface="Calibri" pitchFamily="34" charset="-120"/>
+              </a:rPr>
+              <a:t>subárvore</a:t>
+            </a:r>
+            <a:r>
+              <a:rPr lang="en-US" sz="1200" dirty="0">
+                <a:solidFill>
+                  <a:srgbClr val="22303F"/>
+                </a:solidFill>
+                <a:latin typeface="Calibri" pitchFamily="34" charset="0"/>
+                <a:ea typeface="Calibri" pitchFamily="34" charset="-122"/>
+                <a:cs typeface="Calibri" pitchFamily="34" charset="-120"/>
+              </a:rPr>
+              <a:t> </a:t>
+            </a:r>
+            <a:r>
+              <a:rPr lang="en-US" sz="1200" dirty="0" err="1">
+                <a:solidFill>
+                  <a:srgbClr val="22303F"/>
+                </a:solidFill>
+                <a:latin typeface="Calibri" pitchFamily="34" charset="0"/>
+                <a:ea typeface="Calibri" pitchFamily="34" charset="-122"/>
+                <a:cs typeface="Calibri" pitchFamily="34" charset="-120"/>
+              </a:rPr>
+              <a:t>direita</a:t>
             </a:r>
             <a:endParaRPr lang="en-US" sz="1200" dirty="0"/>
           </a:p>
@@ -15449,7 +15611,7 @@
         </p:nvSpPr>
         <p:spPr>
           <a:xfrm>
-            <a:off x="6172200" y="1874520"/>
+            <a:off x="6181005" y="2039112"/>
             <a:ext cx="914400" cy="228600"/>
           </a:xfrm>
           <a:prstGeom prst="rect">
